--- a/figures/ch7/natural history.pptx
+++ b/figures/ch7/natural history.pptx
@@ -197,7 +197,7 @@
           <a:p>
             <a:fld id="{E0D46A60-255F-684C-A684-CC10752AAD30}" type="datetimeFigureOut">
               <a:rPr lang="en-US" smtClean="0"/>
-              <a:t>1/26/26</a:t>
+              <a:t>2/8/26</a:t>
             </a:fld>
             <a:endParaRPr lang="en-US"/>
           </a:p>
@@ -698,7 +698,7 @@
           <a:p>
             <a:fld id="{19C17EAB-2A75-D149-9D07-4B5426996BDE}" type="datetimeFigureOut">
               <a:rPr lang="en-US" smtClean="0"/>
-              <a:t>1/26/26</a:t>
+              <a:t>2/8/26</a:t>
             </a:fld>
             <a:endParaRPr lang="en-US"/>
           </a:p>
@@ -898,7 +898,7 @@
           <a:p>
             <a:fld id="{19C17EAB-2A75-D149-9D07-4B5426996BDE}" type="datetimeFigureOut">
               <a:rPr lang="en-US" smtClean="0"/>
-              <a:t>1/26/26</a:t>
+              <a:t>2/8/26</a:t>
             </a:fld>
             <a:endParaRPr lang="en-US"/>
           </a:p>
@@ -1108,7 +1108,7 @@
           <a:p>
             <a:fld id="{19C17EAB-2A75-D149-9D07-4B5426996BDE}" type="datetimeFigureOut">
               <a:rPr lang="en-US" smtClean="0"/>
-              <a:t>1/26/26</a:t>
+              <a:t>2/8/26</a:t>
             </a:fld>
             <a:endParaRPr lang="en-US"/>
           </a:p>
@@ -1308,7 +1308,7 @@
           <a:p>
             <a:fld id="{19C17EAB-2A75-D149-9D07-4B5426996BDE}" type="datetimeFigureOut">
               <a:rPr lang="en-US" smtClean="0"/>
-              <a:t>1/26/26</a:t>
+              <a:t>2/8/26</a:t>
             </a:fld>
             <a:endParaRPr lang="en-US"/>
           </a:p>
@@ -1584,7 +1584,7 @@
           <a:p>
             <a:fld id="{19C17EAB-2A75-D149-9D07-4B5426996BDE}" type="datetimeFigureOut">
               <a:rPr lang="en-US" smtClean="0"/>
-              <a:t>1/26/26</a:t>
+              <a:t>2/8/26</a:t>
             </a:fld>
             <a:endParaRPr lang="en-US"/>
           </a:p>
@@ -1852,7 +1852,7 @@
           <a:p>
             <a:fld id="{19C17EAB-2A75-D149-9D07-4B5426996BDE}" type="datetimeFigureOut">
               <a:rPr lang="en-US" smtClean="0"/>
-              <a:t>1/26/26</a:t>
+              <a:t>2/8/26</a:t>
             </a:fld>
             <a:endParaRPr lang="en-US"/>
           </a:p>
@@ -2267,7 +2267,7 @@
           <a:p>
             <a:fld id="{19C17EAB-2A75-D149-9D07-4B5426996BDE}" type="datetimeFigureOut">
               <a:rPr lang="en-US" smtClean="0"/>
-              <a:t>1/26/26</a:t>
+              <a:t>2/8/26</a:t>
             </a:fld>
             <a:endParaRPr lang="en-US"/>
           </a:p>
@@ -2409,7 +2409,7 @@
           <a:p>
             <a:fld id="{19C17EAB-2A75-D149-9D07-4B5426996BDE}" type="datetimeFigureOut">
               <a:rPr lang="en-US" smtClean="0"/>
-              <a:t>1/26/26</a:t>
+              <a:t>2/8/26</a:t>
             </a:fld>
             <a:endParaRPr lang="en-US"/>
           </a:p>
@@ -2522,7 +2522,7 @@
           <a:p>
             <a:fld id="{19C17EAB-2A75-D149-9D07-4B5426996BDE}" type="datetimeFigureOut">
               <a:rPr lang="en-US" smtClean="0"/>
-              <a:t>1/26/26</a:t>
+              <a:t>2/8/26</a:t>
             </a:fld>
             <a:endParaRPr lang="en-US"/>
           </a:p>
@@ -2835,7 +2835,7 @@
           <a:p>
             <a:fld id="{19C17EAB-2A75-D149-9D07-4B5426996BDE}" type="datetimeFigureOut">
               <a:rPr lang="en-US" smtClean="0"/>
-              <a:t>1/26/26</a:t>
+              <a:t>2/8/26</a:t>
             </a:fld>
             <a:endParaRPr lang="en-US"/>
           </a:p>
@@ -3124,7 +3124,7 @@
           <a:p>
             <a:fld id="{19C17EAB-2A75-D149-9D07-4B5426996BDE}" type="datetimeFigureOut">
               <a:rPr lang="en-US" smtClean="0"/>
-              <a:t>1/26/26</a:t>
+              <a:t>2/8/26</a:t>
             </a:fld>
             <a:endParaRPr lang="en-US"/>
           </a:p>
@@ -3367,7 +3367,7 @@
           <a:p>
             <a:fld id="{19C17EAB-2A75-D149-9D07-4B5426996BDE}" type="datetimeFigureOut">
               <a:rPr lang="en-US" smtClean="0"/>
-              <a:t>1/26/26</a:t>
+              <a:t>2/8/26</a:t>
             </a:fld>
             <a:endParaRPr lang="en-US"/>
           </a:p>
@@ -4861,15 +4861,15 @@
         </p:nvPicPr>
         <p:blipFill rotWithShape="1">
           <a:blip r:embed="rId4"/>
-          <a:srcRect l="7842" t="1" r="-351" b="899"/>
+          <a:srcRect l="8755" t="2848" r="2403" b="4433"/>
           <a:stretch>
             <a:fillRect/>
           </a:stretch>
         </p:blipFill>
         <p:spPr>
           <a:xfrm flipH="1">
-            <a:off x="46549" y="4665832"/>
-            <a:ext cx="1111203" cy="983811"/>
+            <a:off x="79615" y="4694093"/>
+            <a:ext cx="1067167" cy="920466"/>
           </a:xfrm>
           <a:prstGeom prst="rect">
             <a:avLst/>

--- a/figures/ch7/natural history.pptx
+++ b/figures/ch7/natural history.pptx
@@ -197,7 +197,7 @@
           <a:p>
             <a:fld id="{E0D46A60-255F-684C-A684-CC10752AAD30}" type="datetimeFigureOut">
               <a:rPr lang="en-US" smtClean="0"/>
-              <a:t>2/8/26</a:t>
+              <a:t>2/17/26</a:t>
             </a:fld>
             <a:endParaRPr lang="en-US"/>
           </a:p>
@@ -698,7 +698,7 @@
           <a:p>
             <a:fld id="{19C17EAB-2A75-D149-9D07-4B5426996BDE}" type="datetimeFigureOut">
               <a:rPr lang="en-US" smtClean="0"/>
-              <a:t>2/8/26</a:t>
+              <a:t>2/17/26</a:t>
             </a:fld>
             <a:endParaRPr lang="en-US"/>
           </a:p>
@@ -898,7 +898,7 @@
           <a:p>
             <a:fld id="{19C17EAB-2A75-D149-9D07-4B5426996BDE}" type="datetimeFigureOut">
               <a:rPr lang="en-US" smtClean="0"/>
-              <a:t>2/8/26</a:t>
+              <a:t>2/17/26</a:t>
             </a:fld>
             <a:endParaRPr lang="en-US"/>
           </a:p>
@@ -1108,7 +1108,7 @@
           <a:p>
             <a:fld id="{19C17EAB-2A75-D149-9D07-4B5426996BDE}" type="datetimeFigureOut">
               <a:rPr lang="en-US" smtClean="0"/>
-              <a:t>2/8/26</a:t>
+              <a:t>2/17/26</a:t>
             </a:fld>
             <a:endParaRPr lang="en-US"/>
           </a:p>
@@ -1308,7 +1308,7 @@
           <a:p>
             <a:fld id="{19C17EAB-2A75-D149-9D07-4B5426996BDE}" type="datetimeFigureOut">
               <a:rPr lang="en-US" smtClean="0"/>
-              <a:t>2/8/26</a:t>
+              <a:t>2/17/26</a:t>
             </a:fld>
             <a:endParaRPr lang="en-US"/>
           </a:p>
@@ -1584,7 +1584,7 @@
           <a:p>
             <a:fld id="{19C17EAB-2A75-D149-9D07-4B5426996BDE}" type="datetimeFigureOut">
               <a:rPr lang="en-US" smtClean="0"/>
-              <a:t>2/8/26</a:t>
+              <a:t>2/17/26</a:t>
             </a:fld>
             <a:endParaRPr lang="en-US"/>
           </a:p>
@@ -1852,7 +1852,7 @@
           <a:p>
             <a:fld id="{19C17EAB-2A75-D149-9D07-4B5426996BDE}" type="datetimeFigureOut">
               <a:rPr lang="en-US" smtClean="0"/>
-              <a:t>2/8/26</a:t>
+              <a:t>2/17/26</a:t>
             </a:fld>
             <a:endParaRPr lang="en-US"/>
           </a:p>
@@ -2267,7 +2267,7 @@
           <a:p>
             <a:fld id="{19C17EAB-2A75-D149-9D07-4B5426996BDE}" type="datetimeFigureOut">
               <a:rPr lang="en-US" smtClean="0"/>
-              <a:t>2/8/26</a:t>
+              <a:t>2/17/26</a:t>
             </a:fld>
             <a:endParaRPr lang="en-US"/>
           </a:p>
@@ -2409,7 +2409,7 @@
           <a:p>
             <a:fld id="{19C17EAB-2A75-D149-9D07-4B5426996BDE}" type="datetimeFigureOut">
               <a:rPr lang="en-US" smtClean="0"/>
-              <a:t>2/8/26</a:t>
+              <a:t>2/17/26</a:t>
             </a:fld>
             <a:endParaRPr lang="en-US"/>
           </a:p>
@@ -2522,7 +2522,7 @@
           <a:p>
             <a:fld id="{19C17EAB-2A75-D149-9D07-4B5426996BDE}" type="datetimeFigureOut">
               <a:rPr lang="en-US" smtClean="0"/>
-              <a:t>2/8/26</a:t>
+              <a:t>2/17/26</a:t>
             </a:fld>
             <a:endParaRPr lang="en-US"/>
           </a:p>
@@ -2835,7 +2835,7 @@
           <a:p>
             <a:fld id="{19C17EAB-2A75-D149-9D07-4B5426996BDE}" type="datetimeFigureOut">
               <a:rPr lang="en-US" smtClean="0"/>
-              <a:t>2/8/26</a:t>
+              <a:t>2/17/26</a:t>
             </a:fld>
             <a:endParaRPr lang="en-US"/>
           </a:p>
@@ -3124,7 +3124,7 @@
           <a:p>
             <a:fld id="{19C17EAB-2A75-D149-9D07-4B5426996BDE}" type="datetimeFigureOut">
               <a:rPr lang="en-US" smtClean="0"/>
-              <a:t>2/8/26</a:t>
+              <a:t>2/17/26</a:t>
             </a:fld>
             <a:endParaRPr lang="en-US"/>
           </a:p>
@@ -3367,7 +3367,7 @@
           <a:p>
             <a:fld id="{19C17EAB-2A75-D149-9D07-4B5426996BDE}" type="datetimeFigureOut">
               <a:rPr lang="en-US" smtClean="0"/>
-              <a:t>2/8/26</a:t>
+              <a:t>2/17/26</a:t>
             </a:fld>
             <a:endParaRPr lang="en-US"/>
           </a:p>
@@ -3786,124 +3786,28 @@
       </p:grpSpPr>
       <p:cxnSp>
         <p:nvCxnSpPr>
-          <p:cNvPr id="57" name="Straight Connector 56">
-            <a:extLst>
-              <a:ext uri="{FF2B5EF4-FFF2-40B4-BE49-F238E27FC236}">
-                <a16:creationId xmlns:a16="http://schemas.microsoft.com/office/drawing/2014/main" id="{FC5C3321-8724-59C7-651C-2E4582932739}"/>
+          <p:cNvPr id="88" name="Straight Connector 87">
+            <a:extLst>
+              <a:ext uri="{FF2B5EF4-FFF2-40B4-BE49-F238E27FC236}">
+                <a16:creationId xmlns:a16="http://schemas.microsoft.com/office/drawing/2014/main" id="{FD5D7E89-9749-109B-DA2C-D7524C0BF7BC}"/>
               </a:ext>
             </a:extLst>
           </p:cNvPr>
           <p:cNvCxnSpPr>
             <a:cxnSpLocks/>
+            <a:stCxn id="16" idx="3"/>
           </p:cNvCxnSpPr>
           <p:nvPr/>
         </p:nvCxnSpPr>
         <p:spPr>
-          <a:xfrm flipV="1">
-            <a:off x="1266979" y="4034410"/>
-            <a:ext cx="2921668" cy="1633369"/>
-          </a:xfrm>
-          <a:prstGeom prst="line">
-            <a:avLst/>
-          </a:prstGeom>
-          <a:ln w="57150"/>
-        </p:spPr>
-        <p:style>
-          <a:lnRef idx="2">
-            <a:schemeClr val="dk1"/>
-          </a:lnRef>
-          <a:fillRef idx="0">
-            <a:schemeClr val="dk1"/>
-          </a:fillRef>
-          <a:effectRef idx="1">
-            <a:schemeClr val="dk1"/>
-          </a:effectRef>
-          <a:fontRef idx="minor">
-            <a:schemeClr val="tx1"/>
-          </a:fontRef>
-        </p:style>
-      </p:cxnSp>
-      <p:sp>
-        <p:nvSpPr>
-          <p:cNvPr id="126" name="Rectangle 125">
-            <a:extLst>
-              <a:ext uri="{FF2B5EF4-FFF2-40B4-BE49-F238E27FC236}">
-                <a16:creationId xmlns:a16="http://schemas.microsoft.com/office/drawing/2014/main" id="{C086D2D2-FCA6-FE09-9F44-BD5CE87C0AED}"/>
-              </a:ext>
-            </a:extLst>
-          </p:cNvPr>
-          <p:cNvSpPr/>
-          <p:nvPr/>
-        </p:nvSpPr>
-        <p:spPr>
-          <a:xfrm>
-            <a:off x="1220560" y="893005"/>
-            <a:ext cx="10214433" cy="732597"/>
-          </a:xfrm>
-          <a:prstGeom prst="rect">
-            <a:avLst/>
-          </a:prstGeom>
-          <a:solidFill>
-            <a:schemeClr val="accent2">
-              <a:lumMod val="20000"/>
-              <a:lumOff val="80000"/>
-            </a:schemeClr>
-          </a:solidFill>
-        </p:spPr>
-        <p:style>
-          <a:lnRef idx="2">
-            <a:schemeClr val="accent1">
-              <a:shade val="15000"/>
-            </a:schemeClr>
-          </a:lnRef>
-          <a:fillRef idx="1">
-            <a:schemeClr val="accent1"/>
-          </a:fillRef>
-          <a:effectRef idx="0">
-            <a:schemeClr val="accent1"/>
-          </a:effectRef>
-          <a:fontRef idx="minor">
-            <a:schemeClr val="lt1"/>
-          </a:fontRef>
-        </p:style>
-        <p:txBody>
-          <a:bodyPr rtlCol="0" anchor="ctr"/>
-          <a:lstStyle/>
-          <a:p>
-            <a:pPr algn="ctr"/>
-            <a:endParaRPr lang="en-US">
-              <a:latin typeface="LMRoman10" panose="02000503020200000003" pitchFamily="2" charset="77"/>
-              <a:cs typeface="LMRoman10" panose="02000503020200000003" pitchFamily="2" charset="77"/>
-            </a:endParaRPr>
-          </a:p>
-        </p:txBody>
-      </p:sp>
-      <p:cxnSp>
-        <p:nvCxnSpPr>
-          <p:cNvPr id="78" name="Straight Connector 77">
-            <a:extLst>
-              <a:ext uri="{FF2B5EF4-FFF2-40B4-BE49-F238E27FC236}">
-                <a16:creationId xmlns:a16="http://schemas.microsoft.com/office/drawing/2014/main" id="{493DF367-93A4-06A6-1A8A-97C8E10CC4B6}"/>
-              </a:ext>
-            </a:extLst>
-          </p:cNvPr>
-          <p:cNvCxnSpPr>
-            <a:cxnSpLocks/>
-          </p:cNvCxnSpPr>
-          <p:nvPr/>
-        </p:nvCxnSpPr>
-        <p:spPr>
-          <a:xfrm>
-            <a:off x="2235074" y="5153814"/>
-            <a:ext cx="5998234" cy="495829"/>
+          <a:xfrm flipH="1" flipV="1">
+            <a:off x="8518415" y="4442486"/>
+            <a:ext cx="2916577" cy="855780"/>
           </a:xfrm>
           <a:prstGeom prst="line">
             <a:avLst/>
           </a:prstGeom>
           <a:ln w="57150">
-            <a:solidFill>
-              <a:srgbClr val="00B050"/>
-            </a:solidFill>
             <a:prstDash val="sysDot"/>
           </a:ln>
         </p:spPr>
@@ -3924,10 +3828,10 @@
       </p:cxnSp>
       <p:cxnSp>
         <p:nvCxnSpPr>
-          <p:cNvPr id="88" name="Straight Connector 87">
-            <a:extLst>
-              <a:ext uri="{FF2B5EF4-FFF2-40B4-BE49-F238E27FC236}">
-                <a16:creationId xmlns:a16="http://schemas.microsoft.com/office/drawing/2014/main" id="{FD5D7E89-9749-109B-DA2C-D7524C0BF7BC}"/>
+          <p:cNvPr id="14" name="Straight Connector 13">
+            <a:extLst>
+              <a:ext uri="{FF2B5EF4-FFF2-40B4-BE49-F238E27FC236}">
+                <a16:creationId xmlns:a16="http://schemas.microsoft.com/office/drawing/2014/main" id="{12B7D8D3-D452-DD32-A093-F77D4A5111CD}"/>
               </a:ext>
             </a:extLst>
           </p:cNvPr>
@@ -3937,14 +3841,157 @@
           <p:nvPr/>
         </p:nvCxnSpPr>
         <p:spPr>
-          <a:xfrm flipH="1" flipV="1">
-            <a:off x="8507314" y="5178400"/>
-            <a:ext cx="2899310" cy="248071"/>
+          <a:xfrm>
+            <a:off x="8518415" y="4430300"/>
+            <a:ext cx="2888209" cy="0"/>
+          </a:xfrm>
+          <a:prstGeom prst="line">
+            <a:avLst/>
+          </a:prstGeom>
+          <a:ln w="28575">
+            <a:solidFill>
+              <a:srgbClr val="C00000"/>
+            </a:solidFill>
+            <a:prstDash val="solid"/>
+          </a:ln>
+        </p:spPr>
+        <p:style>
+          <a:lnRef idx="1">
+            <a:schemeClr val="accent2"/>
+          </a:lnRef>
+          <a:fillRef idx="0">
+            <a:schemeClr val="accent2"/>
+          </a:fillRef>
+          <a:effectRef idx="0">
+            <a:schemeClr val="accent2"/>
+          </a:effectRef>
+          <a:fontRef idx="minor">
+            <a:schemeClr val="tx1"/>
+          </a:fontRef>
+        </p:style>
+      </p:cxnSp>
+      <p:cxnSp>
+        <p:nvCxnSpPr>
+          <p:cNvPr id="57" name="Straight Connector 56">
+            <a:extLst>
+              <a:ext uri="{FF2B5EF4-FFF2-40B4-BE49-F238E27FC236}">
+                <a16:creationId xmlns:a16="http://schemas.microsoft.com/office/drawing/2014/main" id="{FC5C3321-8724-59C7-651C-2E4582932739}"/>
+              </a:ext>
+            </a:extLst>
+          </p:cNvPr>
+          <p:cNvCxnSpPr>
+            <a:cxnSpLocks/>
+          </p:cNvCxnSpPr>
+          <p:nvPr/>
+        </p:nvCxnSpPr>
+        <p:spPr>
+          <a:xfrm flipV="1">
+            <a:off x="1266979" y="4034410"/>
+            <a:ext cx="2921668" cy="1633369"/>
           </a:xfrm>
           <a:prstGeom prst="line">
             <a:avLst/>
           </a:prstGeom>
           <a:ln w="57150"/>
+        </p:spPr>
+        <p:style>
+          <a:lnRef idx="2">
+            <a:schemeClr val="dk1"/>
+          </a:lnRef>
+          <a:fillRef idx="0">
+            <a:schemeClr val="dk1"/>
+          </a:fillRef>
+          <a:effectRef idx="1">
+            <a:schemeClr val="dk1"/>
+          </a:effectRef>
+          <a:fontRef idx="minor">
+            <a:schemeClr val="tx1"/>
+          </a:fontRef>
+        </p:style>
+      </p:cxnSp>
+      <p:sp>
+        <p:nvSpPr>
+          <p:cNvPr id="126" name="Rectangle 125">
+            <a:extLst>
+              <a:ext uri="{FF2B5EF4-FFF2-40B4-BE49-F238E27FC236}">
+                <a16:creationId xmlns:a16="http://schemas.microsoft.com/office/drawing/2014/main" id="{C086D2D2-FCA6-FE09-9F44-BD5CE87C0AED}"/>
+              </a:ext>
+            </a:extLst>
+          </p:cNvPr>
+          <p:cNvSpPr/>
+          <p:nvPr/>
+        </p:nvSpPr>
+        <p:spPr>
+          <a:xfrm>
+            <a:off x="1220560" y="893005"/>
+            <a:ext cx="10214433" cy="732597"/>
+          </a:xfrm>
+          <a:prstGeom prst="rect">
+            <a:avLst/>
+          </a:prstGeom>
+          <a:solidFill>
+            <a:schemeClr val="accent2">
+              <a:lumMod val="20000"/>
+              <a:lumOff val="80000"/>
+            </a:schemeClr>
+          </a:solidFill>
+        </p:spPr>
+        <p:style>
+          <a:lnRef idx="2">
+            <a:schemeClr val="accent1">
+              <a:shade val="15000"/>
+            </a:schemeClr>
+          </a:lnRef>
+          <a:fillRef idx="1">
+            <a:schemeClr val="accent1"/>
+          </a:fillRef>
+          <a:effectRef idx="0">
+            <a:schemeClr val="accent1"/>
+          </a:effectRef>
+          <a:fontRef idx="minor">
+            <a:schemeClr val="lt1"/>
+          </a:fontRef>
+        </p:style>
+        <p:txBody>
+          <a:bodyPr rtlCol="0" anchor="ctr"/>
+          <a:lstStyle/>
+          <a:p>
+            <a:pPr algn="ctr"/>
+            <a:endParaRPr lang="en-US">
+              <a:latin typeface="LMRoman10" panose="02000503020200000003" pitchFamily="2" charset="77"/>
+              <a:cs typeface="LMRoman10" panose="02000503020200000003" pitchFamily="2" charset="77"/>
+            </a:endParaRPr>
+          </a:p>
+        </p:txBody>
+      </p:sp>
+      <p:cxnSp>
+        <p:nvCxnSpPr>
+          <p:cNvPr id="78" name="Straight Connector 77">
+            <a:extLst>
+              <a:ext uri="{FF2B5EF4-FFF2-40B4-BE49-F238E27FC236}">
+                <a16:creationId xmlns:a16="http://schemas.microsoft.com/office/drawing/2014/main" id="{493DF367-93A4-06A6-1A8A-97C8E10CC4B6}"/>
+              </a:ext>
+            </a:extLst>
+          </p:cNvPr>
+          <p:cNvCxnSpPr>
+            <a:cxnSpLocks/>
+          </p:cNvCxnSpPr>
+          <p:nvPr/>
+        </p:nvCxnSpPr>
+        <p:spPr>
+          <a:xfrm>
+            <a:off x="2235074" y="5153814"/>
+            <a:ext cx="5998234" cy="495829"/>
+          </a:xfrm>
+          <a:prstGeom prst="line">
+            <a:avLst/>
+          </a:prstGeom>
+          <a:ln w="57150">
+            <a:solidFill>
+              <a:srgbClr val="00B050"/>
+            </a:solidFill>
+            <a:prstDash val="sysDot"/>
+          </a:ln>
         </p:spPr>
         <p:style>
           <a:lnRef idx="2">
@@ -4448,7 +4495,7 @@
         </p:nvSpPr>
         <p:spPr>
           <a:xfrm>
-            <a:off x="10371244" y="3188872"/>
+            <a:off x="10363531" y="2505448"/>
             <a:ext cx="1080745" cy="369332"/>
           </a:xfrm>
           <a:prstGeom prst="rect">
@@ -4481,150 +4528,57 @@
           </a:p>
         </p:txBody>
       </p:sp>
-      <mc:AlternateContent xmlns:mc="http://schemas.openxmlformats.org/markup-compatibility/2006" xmlns:a14="http://schemas.microsoft.com/office/drawing/2010/main">
-        <mc:Choice Requires="a14">
-          <p:sp>
-            <p:nvSpPr>
-              <p:cNvPr id="16" name="TextBox 15">
-                <a:extLst>
-                  <a:ext uri="{FF2B5EF4-FFF2-40B4-BE49-F238E27FC236}">
-                    <a16:creationId xmlns:a16="http://schemas.microsoft.com/office/drawing/2014/main" id="{79B2EEE2-1B8D-1DAF-C293-4CD6BA256876}"/>
-                  </a:ext>
-                </a:extLst>
-              </p:cNvPr>
-              <p:cNvSpPr txBox="1"/>
-              <p:nvPr/>
-            </p:nvSpPr>
-            <p:spPr>
-              <a:xfrm>
-                <a:off x="9614023" y="4825572"/>
-                <a:ext cx="1811426" cy="369332"/>
-              </a:xfrm>
-              <a:prstGeom prst="rect">
-                <a:avLst/>
-              </a:prstGeom>
-              <a:noFill/>
-              <a:ln w="28575">
+      <p:sp>
+        <p:nvSpPr>
+          <p:cNvPr id="16" name="TextBox 15">
+            <a:extLst>
+              <a:ext uri="{FF2B5EF4-FFF2-40B4-BE49-F238E27FC236}">
+                <a16:creationId xmlns:a16="http://schemas.microsoft.com/office/drawing/2014/main" id="{79B2EEE2-1B8D-1DAF-C293-4CD6BA256876}"/>
+              </a:ext>
+            </a:extLst>
+          </p:cNvPr>
+          <p:cNvSpPr txBox="1"/>
+          <p:nvPr/>
+        </p:nvSpPr>
+        <p:spPr>
+          <a:xfrm>
+            <a:off x="10649415" y="5113600"/>
+            <a:ext cx="785577" cy="369332"/>
+          </a:xfrm>
+          <a:prstGeom prst="rect">
+            <a:avLst/>
+          </a:prstGeom>
+          <a:solidFill>
+            <a:schemeClr val="bg1"/>
+          </a:solidFill>
+          <a:ln w="28575">
+            <a:solidFill>
+              <a:schemeClr val="tx1"/>
+            </a:solidFill>
+          </a:ln>
+        </p:spPr>
+        <p:txBody>
+          <a:bodyPr wrap="square" rtlCol="0">
+            <a:spAutoFit/>
+          </a:bodyPr>
+          <a:lstStyle/>
+          <a:p>
+            <a:pPr algn="r"/>
+            <a:r>
+              <a:rPr lang="en-US" b="1" dirty="0">
                 <a:solidFill>
-                  <a:schemeClr val="tx1"/>
+                  <a:schemeClr val="accent6">
+                    <a:lumMod val="75000"/>
+                  </a:schemeClr>
                 </a:solidFill>
-              </a:ln>
-            </p:spPr>
-            <p:txBody>
-              <a:bodyPr wrap="square" rtlCol="0">
-                <a:spAutoFit/>
-              </a:bodyPr>
-              <a:lstStyle/>
-              <a:p>
-                <a:pPr algn="r"/>
-                <a:r>
-                  <a:rPr lang="en-US" b="1" dirty="0">
-                    <a:solidFill>
-                      <a:schemeClr val="accent6">
-                        <a:lumMod val="75000"/>
-                      </a:schemeClr>
-                    </a:solidFill>
-                    <a:latin typeface="LMRoman10" panose="02000503020200000003" pitchFamily="2" charset="77"/>
-                    <a:cs typeface="LMRoman10" panose="02000503020200000003" pitchFamily="2" charset="77"/>
-                  </a:rPr>
-                  <a:t>Cure</a:t>
-                </a:r>
-                <a14:m>
-                  <m:oMath xmlns:m="http://schemas.openxmlformats.org/officeDocument/2006/math">
-                    <m:r>
-                      <a:rPr lang="en-GB" b="1" i="0" smtClean="0">
-                        <a:solidFill>
-                          <a:schemeClr val="accent6">
-                            <a:lumMod val="75000"/>
-                          </a:schemeClr>
-                        </a:solidFill>
-                        <a:latin typeface="Cambria Math" panose="02040503050406030204" pitchFamily="18" charset="0"/>
-                        <a:ea typeface="Cambria Math" panose="02040503050406030204" pitchFamily="18" charset="0"/>
-                        <a:cs typeface="LMRoman10" panose="02000503020200000003" pitchFamily="2" charset="77"/>
-                      </a:rPr>
-                      <m:t> </m:t>
-                    </m:r>
-                    <m:r>
-                      <a:rPr lang="en-US" b="1" i="1" smtClean="0">
-                        <a:solidFill>
-                          <a:schemeClr val="accent6">
-                            <a:lumMod val="75000"/>
-                          </a:schemeClr>
-                        </a:solidFill>
-                        <a:latin typeface="Cambria Math" panose="02040503050406030204" pitchFamily="18" charset="0"/>
-                        <a:ea typeface="Cambria Math" panose="02040503050406030204" pitchFamily="18" charset="0"/>
-                        <a:cs typeface="LMRoman10" panose="02000503020200000003" pitchFamily="2" charset="77"/>
-                      </a:rPr>
-                      <m:t>±</m:t>
-                    </m:r>
-                  </m:oMath>
-                </a14:m>
-                <a:r>
-                  <a:rPr lang="en-US" b="1" dirty="0">
-                    <a:solidFill>
-                      <a:schemeClr val="accent6">
-                        <a:lumMod val="75000"/>
-                      </a:schemeClr>
-                    </a:solidFill>
-                    <a:latin typeface="LMRoman10" panose="02000503020200000003" pitchFamily="2" charset="77"/>
-                    <a:cs typeface="LMRoman10" panose="02000503020200000003" pitchFamily="2" charset="77"/>
-                  </a:rPr>
-                  <a:t> PKDL</a:t>
-                </a:r>
-              </a:p>
-            </p:txBody>
-          </p:sp>
-        </mc:Choice>
-        <mc:Fallback xmlns="">
-          <p:sp>
-            <p:nvSpPr>
-              <p:cNvPr id="16" name="TextBox 15">
-                <a:extLst>
-                  <a:ext uri="{FF2B5EF4-FFF2-40B4-BE49-F238E27FC236}">
-                    <a16:creationId xmlns:a16="http://schemas.microsoft.com/office/drawing/2014/main" id="{79B2EEE2-1B8D-1DAF-C293-4CD6BA256876}"/>
-                  </a:ext>
-                </a:extLst>
-              </p:cNvPr>
-              <p:cNvSpPr txBox="1">
-                <a:spLocks noRot="1" noChangeAspect="1" noMove="1" noResize="1" noEditPoints="1" noAdjustHandles="1" noChangeArrowheads="1" noChangeShapeType="1" noTextEdit="1"/>
-              </p:cNvSpPr>
-              <p:nvPr/>
-            </p:nvSpPr>
-            <p:spPr>
-              <a:xfrm>
-                <a:off x="9614023" y="4825572"/>
-                <a:ext cx="1811426" cy="369332"/>
-              </a:xfrm>
-              <a:prstGeom prst="rect">
-                <a:avLst/>
-              </a:prstGeom>
-              <a:blipFill>
-                <a:blip r:embed="rId3"/>
-                <a:stretch>
-                  <a:fillRect l="-2069" t="-6250" r="-2069" b="-15625"/>
-                </a:stretch>
-              </a:blipFill>
-              <a:ln w="28575">
-                <a:solidFill>
-                  <a:schemeClr val="tx1"/>
-                </a:solidFill>
-              </a:ln>
-            </p:spPr>
-            <p:txBody>
-              <a:bodyPr/>
-              <a:lstStyle/>
-              <a:p>
-                <a:r>
-                  <a:rPr lang="en-US">
-                    <a:noFill/>
-                  </a:rPr>
-                  <a:t> </a:t>
-                </a:r>
-              </a:p>
-            </p:txBody>
-          </p:sp>
-        </mc:Fallback>
-      </mc:AlternateContent>
+                <a:latin typeface="LMRoman10" panose="02000503020200000003" pitchFamily="2" charset="77"/>
+                <a:cs typeface="LMRoman10" panose="02000503020200000003" pitchFamily="2" charset="77"/>
+              </a:rPr>
+              <a:t>Cure</a:t>
+            </a:r>
+          </a:p>
+        </p:txBody>
+      </p:sp>
       <p:sp>
         <p:nvSpPr>
           <p:cNvPr id="23" name="TextBox 22">
@@ -4860,7 +4814,7 @@
           <p:nvPr/>
         </p:nvPicPr>
         <p:blipFill rotWithShape="1">
-          <a:blip r:embed="rId4"/>
+          <a:blip r:embed="rId3"/>
           <a:srcRect l="8755" t="2848" r="2403" b="4433"/>
           <a:stretch>
             <a:fillRect/>
@@ -4947,7 +4901,7 @@
         </p:nvSpPr>
         <p:spPr>
           <a:xfrm rot="5400000">
-            <a:off x="9273930" y="5790896"/>
+            <a:off x="11104935" y="5724016"/>
             <a:ext cx="165994" cy="514192"/>
           </a:xfrm>
           <a:prstGeom prst="upArrow">
@@ -4999,7 +4953,7 @@
         </p:nvSpPr>
         <p:spPr>
           <a:xfrm>
-            <a:off x="8342604" y="5881716"/>
+            <a:off x="10173609" y="5814836"/>
             <a:ext cx="718466" cy="338554"/>
           </a:xfrm>
           <a:prstGeom prst="rect">
@@ -5182,7 +5136,7 @@
                 <a:latin typeface="LMRoman10" panose="02000503020200000003" pitchFamily="2" charset="77"/>
                 <a:cs typeface="LMRoman10" panose="02000503020200000003" pitchFamily="2" charset="77"/>
               </a:rPr>
-              <a:t>~ 30-40 days</a:t>
+              <a:t>~ 10-200 days</a:t>
             </a:r>
           </a:p>
         </p:txBody>
@@ -5573,7 +5527,7 @@
         <p:spPr>
           <a:xfrm flipH="1" flipV="1">
             <a:off x="6116218" y="2438842"/>
-            <a:ext cx="2411842" cy="2748134"/>
+            <a:ext cx="2411842" cy="2003644"/>
           </a:xfrm>
           <a:prstGeom prst="line">
             <a:avLst/>
@@ -5608,8 +5562,8 @@
           <p:nvPr/>
         </p:nvSpPr>
         <p:spPr>
-          <a:xfrm rot="2944750">
-            <a:off x="6519691" y="3769486"/>
+          <a:xfrm rot="2323733">
+            <a:off x="6586597" y="3802939"/>
             <a:ext cx="2210862" cy="276999"/>
           </a:xfrm>
           <a:prstGeom prst="rect">
@@ -5653,8 +5607,8 @@
         </p:nvCxnSpPr>
         <p:spPr>
           <a:xfrm flipH="1">
-            <a:off x="8524027" y="3730560"/>
-            <a:ext cx="2882597" cy="1425817"/>
+            <a:off x="8528060" y="2983555"/>
+            <a:ext cx="2866590" cy="1458931"/>
           </a:xfrm>
           <a:prstGeom prst="line">
             <a:avLst/>
@@ -6066,7 +6020,7 @@
         </p:nvSpPr>
         <p:spPr>
           <a:xfrm rot="16200000">
-            <a:off x="10668407" y="2311936"/>
+            <a:off x="10684307" y="1640037"/>
             <a:ext cx="307777" cy="1205494"/>
           </a:xfrm>
           <a:prstGeom prst="triangle">
@@ -6114,6 +6068,47 @@
               <a:latin typeface="LMRoman10" panose="02000503020200000003" pitchFamily="2" charset="77"/>
               <a:cs typeface="LMRoman10" panose="02000503020200000003" pitchFamily="2" charset="77"/>
             </a:endParaRPr>
+          </a:p>
+        </p:txBody>
+      </p:sp>
+      <p:sp>
+        <p:nvSpPr>
+          <p:cNvPr id="24" name="TextBox 23">
+            <a:extLst>
+              <a:ext uri="{FF2B5EF4-FFF2-40B4-BE49-F238E27FC236}">
+                <a16:creationId xmlns:a16="http://schemas.microsoft.com/office/drawing/2014/main" id="{C92F3EB9-B2C6-84EB-187C-6F93E84A5496}"/>
+              </a:ext>
+            </a:extLst>
+          </p:cNvPr>
+          <p:cNvSpPr txBox="1"/>
+          <p:nvPr/>
+        </p:nvSpPr>
+        <p:spPr>
+          <a:xfrm>
+            <a:off x="9576537" y="4150116"/>
+            <a:ext cx="1846980" cy="276999"/>
+          </a:xfrm>
+          <a:prstGeom prst="rect">
+            <a:avLst/>
+          </a:prstGeom>
+          <a:noFill/>
+        </p:spPr>
+        <p:txBody>
+          <a:bodyPr wrap="none" rtlCol="0">
+            <a:spAutoFit/>
+          </a:bodyPr>
+          <a:lstStyle/>
+          <a:p>
+            <a:r>
+              <a:rPr lang="en-US" sz="1200" b="1" i="1" dirty="0">
+                <a:solidFill>
+                  <a:srgbClr val="C00000"/>
+                </a:solidFill>
+                <a:latin typeface="LMRoman10" panose="02000503020200000003" pitchFamily="2" charset="77"/>
+                <a:cs typeface="LMRoman10" panose="02000503020200000003" pitchFamily="2" charset="77"/>
+              </a:rPr>
+              <a:t>Critical parasite load</a:t>
+            </a:r>
           </a:p>
         </p:txBody>
       </p:sp>
